--- a/admin/public/nds/kit-digital/charvolin/nds_a4_charvolin-editable.pptx
+++ b/admin/public/nds/kit-digital/charvolin/nds_a4_charvolin-editable.pptx
@@ -1302,8 +1302,8 @@
         </p:nvSpPr>
         <p:spPr>
           <a:xfrm>
-            <a:off x="0" y="8364303"/>
-            <a:ext cx="7559040" cy="550286"/>
+            <a:off x="0" y="8323369"/>
+            <a:ext cx="7559040" cy="632155"/>
           </a:xfrm>
           <a:prstGeom prst="rect">
             <a:avLst/>
@@ -1319,7 +1319,7 @@
               <a:buNone/>
             </a:pPr>
             <a:r>
-              <a:rPr lang="en-US" sz="2549" b="1" dirty="0">
+              <a:rPr lang="en-US" sz="2928" b="1" dirty="0">
                 <a:solidFill>
                   <a:srgbClr val="FFFFFF"/>
                 </a:solidFill>
@@ -1329,7 +1329,7 @@
               </a:rPr>
               <a:t>+ VOUS JOUEZ + VOS CHANCES AUGMENTENT</a:t>
             </a:r>
-            <a:endParaRPr lang="en-US" sz="2549" dirty="0"/>
+            <a:endParaRPr lang="en-US" sz="2928" dirty="0"/>
           </a:p>
         </p:txBody>
       </p:sp>
